--- a/Greyform Project UI.pptx
+++ b/Greyform Project UI.pptx
@@ -15,7 +15,7 @@
     <p:sldId id="262" r:id="rId12"/>
   </p:sldIdLst>
   <p:sldSz cx="12192000" cy="6858000"/>
-  <p:notesSz cx="6858000" cy="9144000"/>
+  <p:notesSz cx="6797675" cy="9926638"/>
   <p:defaultTextStyle>
     <a:defPPr>
       <a:defRPr lang="en-US"/>
@@ -268,7 +268,7 @@
           <a:p>
             <a:fld id="{06DEC561-C134-41CC-ABA3-593BDF6B9441}" type="datetimeFigureOut">
               <a:rPr lang="en-SG" smtClean="0"/>
-              <a:t>19/5/2025</a:t>
+              <a:t>6/8/2025</a:t>
             </a:fld>
             <a:endParaRPr lang="en-SG"/>
           </a:p>
@@ -468,7 +468,7 @@
           <a:p>
             <a:fld id="{06DEC561-C134-41CC-ABA3-593BDF6B9441}" type="datetimeFigureOut">
               <a:rPr lang="en-SG" smtClean="0"/>
-              <a:t>19/5/2025</a:t>
+              <a:t>6/8/2025</a:t>
             </a:fld>
             <a:endParaRPr lang="en-SG"/>
           </a:p>
@@ -678,7 +678,7 @@
           <a:p>
             <a:fld id="{06DEC561-C134-41CC-ABA3-593BDF6B9441}" type="datetimeFigureOut">
               <a:rPr lang="en-SG" smtClean="0"/>
-              <a:t>19/5/2025</a:t>
+              <a:t>6/8/2025</a:t>
             </a:fld>
             <a:endParaRPr lang="en-SG"/>
           </a:p>
@@ -878,7 +878,7 @@
           <a:p>
             <a:fld id="{06DEC561-C134-41CC-ABA3-593BDF6B9441}" type="datetimeFigureOut">
               <a:rPr lang="en-SG" smtClean="0"/>
-              <a:t>19/5/2025</a:t>
+              <a:t>6/8/2025</a:t>
             </a:fld>
             <a:endParaRPr lang="en-SG"/>
           </a:p>
@@ -1154,7 +1154,7 @@
           <a:p>
             <a:fld id="{06DEC561-C134-41CC-ABA3-593BDF6B9441}" type="datetimeFigureOut">
               <a:rPr lang="en-SG" smtClean="0"/>
-              <a:t>19/5/2025</a:t>
+              <a:t>6/8/2025</a:t>
             </a:fld>
             <a:endParaRPr lang="en-SG"/>
           </a:p>
@@ -1422,7 +1422,7 @@
           <a:p>
             <a:fld id="{06DEC561-C134-41CC-ABA3-593BDF6B9441}" type="datetimeFigureOut">
               <a:rPr lang="en-SG" smtClean="0"/>
-              <a:t>19/5/2025</a:t>
+              <a:t>6/8/2025</a:t>
             </a:fld>
             <a:endParaRPr lang="en-SG"/>
           </a:p>
@@ -1837,7 +1837,7 @@
           <a:p>
             <a:fld id="{06DEC561-C134-41CC-ABA3-593BDF6B9441}" type="datetimeFigureOut">
               <a:rPr lang="en-SG" smtClean="0"/>
-              <a:t>19/5/2025</a:t>
+              <a:t>6/8/2025</a:t>
             </a:fld>
             <a:endParaRPr lang="en-SG"/>
           </a:p>
@@ -1979,7 +1979,7 @@
           <a:p>
             <a:fld id="{06DEC561-C134-41CC-ABA3-593BDF6B9441}" type="datetimeFigureOut">
               <a:rPr lang="en-SG" smtClean="0"/>
-              <a:t>19/5/2025</a:t>
+              <a:t>6/8/2025</a:t>
             </a:fld>
             <a:endParaRPr lang="en-SG"/>
           </a:p>
@@ -2092,7 +2092,7 @@
           <a:p>
             <a:fld id="{06DEC561-C134-41CC-ABA3-593BDF6B9441}" type="datetimeFigureOut">
               <a:rPr lang="en-SG" smtClean="0"/>
-              <a:t>19/5/2025</a:t>
+              <a:t>6/8/2025</a:t>
             </a:fld>
             <a:endParaRPr lang="en-SG"/>
           </a:p>
@@ -2405,7 +2405,7 @@
           <a:p>
             <a:fld id="{06DEC561-C134-41CC-ABA3-593BDF6B9441}" type="datetimeFigureOut">
               <a:rPr lang="en-SG" smtClean="0"/>
-              <a:t>19/5/2025</a:t>
+              <a:t>6/8/2025</a:t>
             </a:fld>
             <a:endParaRPr lang="en-SG"/>
           </a:p>
@@ -2694,7 +2694,7 @@
           <a:p>
             <a:fld id="{06DEC561-C134-41CC-ABA3-593BDF6B9441}" type="datetimeFigureOut">
               <a:rPr lang="en-SG" smtClean="0"/>
-              <a:t>19/5/2025</a:t>
+              <a:t>6/8/2025</a:t>
             </a:fld>
             <a:endParaRPr lang="en-SG"/>
           </a:p>
@@ -2937,7 +2937,7 @@
           <a:p>
             <a:fld id="{06DEC561-C134-41CC-ABA3-593BDF6B9441}" type="datetimeFigureOut">
               <a:rPr lang="en-SG" smtClean="0"/>
-              <a:t>19/5/2025</a:t>
+              <a:t>6/8/2025</a:t>
             </a:fld>
             <a:endParaRPr lang="en-SG"/>
           </a:p>
@@ -9099,6 +9099,14 @@
 </file>
 
 <file path=customXml/item2.xml><?xml version="1.0" encoding="utf-8"?>
+<p:properties xmlns:p="http://schemas.microsoft.com/office/2006/metadata/properties" xmlns:xsi="http://www.w3.org/2001/XMLSchema-instance" xmlns:pc="http://schemas.microsoft.com/office/infopath/2007/PartnerControls">
+  <documentManagement>
+    <_activity xmlns="d7b47298-7dbc-4c4a-b955-e35738c83845" xsi:nil="true"/>
+  </documentManagement>
+</p:properties>
+</file>
+
+<file path=customXml/item3.xml><?xml version="1.0" encoding="utf-8"?>
 <ct:contentTypeSchema xmlns:ct="http://schemas.microsoft.com/office/2006/metadata/contentType" xmlns:ma="http://schemas.microsoft.com/office/2006/metadata/properties/metaAttributes" ct:_="" ma:_="" ma:contentTypeName="Document" ma:contentTypeID="0x010100EA9F74FD6C93414BACF2D33AB9B46B1F" ma:contentTypeVersion="15" ma:contentTypeDescription="Create a new document." ma:contentTypeScope="" ma:versionID="85e183139a7bf430a5cd367af777ffd1">
   <xsd:schema xmlns:xsd="http://www.w3.org/2001/XMLSchema" xmlns:xs="http://www.w3.org/2001/XMLSchema" xmlns:p="http://schemas.microsoft.com/office/2006/metadata/properties" xmlns:ns3="d7b47298-7dbc-4c4a-b955-e35738c83845" xmlns:ns4="4c7a27d0-c111-49d1-947f-3e415c425751" targetNamespace="http://schemas.microsoft.com/office/2006/metadata/properties" ma:root="true" ma:fieldsID="5e8b728fb78f9c3c3084b9e953d972a7" ns3:_="" ns4:_="">
     <xsd:import namespace="d7b47298-7dbc-4c4a-b955-e35738c83845"/>
@@ -9331,14 +9339,6 @@
 </ct:contentTypeSchema>
 </file>
 
-<file path=customXml/item3.xml><?xml version="1.0" encoding="utf-8"?>
-<p:properties xmlns:p="http://schemas.microsoft.com/office/2006/metadata/properties" xmlns:xsi="http://www.w3.org/2001/XMLSchema-instance" xmlns:pc="http://schemas.microsoft.com/office/infopath/2007/PartnerControls">
-  <documentManagement>
-    <_activity xmlns="d7b47298-7dbc-4c4a-b955-e35738c83845" xsi:nil="true"/>
-  </documentManagement>
-</p:properties>
-</file>
-
 <file path=customXml/itemProps1.xml><?xml version="1.0" encoding="utf-8"?>
 <ds:datastoreItem xmlns:ds="http://schemas.openxmlformats.org/officeDocument/2006/customXml" ds:itemID="{F9ADC48C-30EF-420B-88DF-53204CEFDEBA}">
   <ds:schemaRefs>
@@ -9348,6 +9348,23 @@
 </file>
 
 <file path=customXml/itemProps2.xml><?xml version="1.0" encoding="utf-8"?>
+<ds:datastoreItem xmlns:ds="http://schemas.openxmlformats.org/officeDocument/2006/customXml" ds:itemID="{F1B31D4E-9D8D-4F4F-BF06-3ED364301D7D}">
+  <ds:schemaRefs>
+    <ds:schemaRef ds:uri="http://purl.org/dc/dcmitype/"/>
+    <ds:schemaRef ds:uri="http://schemas.microsoft.com/office/2006/documentManagement/types"/>
+    <ds:schemaRef ds:uri="http://purl.org/dc/terms/"/>
+    <ds:schemaRef ds:uri="http://www.w3.org/XML/1998/namespace"/>
+    <ds:schemaRef ds:uri="http://schemas.microsoft.com/office/infopath/2007/PartnerControls"/>
+    <ds:schemaRef ds:uri="http://purl.org/dc/elements/1.1/"/>
+    <ds:schemaRef ds:uri="http://schemas.microsoft.com/office/2006/metadata/properties"/>
+    <ds:schemaRef ds:uri="d7b47298-7dbc-4c4a-b955-e35738c83845"/>
+    <ds:schemaRef ds:uri="http://schemas.openxmlformats.org/package/2006/metadata/core-properties"/>
+    <ds:schemaRef ds:uri="4c7a27d0-c111-49d1-947f-3e415c425751"/>
+  </ds:schemaRefs>
+</ds:datastoreItem>
+</file>
+
+<file path=customXml/itemProps3.xml><?xml version="1.0" encoding="utf-8"?>
 <ds:datastoreItem xmlns:ds="http://schemas.openxmlformats.org/officeDocument/2006/customXml" ds:itemID="{664B3E63-6F0E-401B-B357-6262053BC5F9}">
   <ds:schemaRefs>
     <ds:schemaRef ds:uri="http://schemas.microsoft.com/office/2006/metadata/contentType"/>
@@ -9364,21 +9381,4 @@
     <ds:schemaRef ds:uri="http://schemas.microsoft.com/internal/obd"/>
   </ds:schemaRefs>
 </ds:datastoreItem>
-</file>
-
-<file path=customXml/itemProps3.xml><?xml version="1.0" encoding="utf-8"?>
-<ds:datastoreItem xmlns:ds="http://schemas.openxmlformats.org/officeDocument/2006/customXml" ds:itemID="{F1B31D4E-9D8D-4F4F-BF06-3ED364301D7D}">
-  <ds:schemaRefs>
-    <ds:schemaRef ds:uri="http://schemas.openxmlformats.org/package/2006/metadata/core-properties"/>
-    <ds:schemaRef ds:uri="4c7a27d0-c111-49d1-947f-3e415c425751"/>
-    <ds:schemaRef ds:uri="http://schemas.microsoft.com/office/2006/metadata/properties"/>
-    <ds:schemaRef ds:uri="http://purl.org/dc/dcmitype/"/>
-    <ds:schemaRef ds:uri="http://purl.org/dc/elements/1.1/"/>
-    <ds:schemaRef ds:uri="http://schemas.microsoft.com/office/2006/documentManagement/types"/>
-    <ds:schemaRef ds:uri="d7b47298-7dbc-4c4a-b955-e35738c83845"/>
-    <ds:schemaRef ds:uri="http://schemas.microsoft.com/office/infopath/2007/PartnerControls"/>
-    <ds:schemaRef ds:uri="http://www.w3.org/XML/1998/namespace"/>
-    <ds:schemaRef ds:uri="http://purl.org/dc/terms/"/>
-  </ds:schemaRefs>
-</ds:datastoreItem>
 </file>